--- a/examples/brand/output/deck.pptx
+++ b/examples/brand/output/deck.pptx
@@ -6561,7 +6561,7 @@
         <p:spPr>
           <a:xfrm>
             <a:off x="640080" y="475488"/>
-            <a:ext cx="7432386" cy="786384"/>
+            <a:ext cx="9464040" cy="786384"/>
           </a:xfrm>
           <a:prstGeom prst="rect">
             <a:avLst/>
@@ -8386,7 +8386,7 @@
         <p:spPr>
           <a:xfrm>
             <a:off x="640080" y="475488"/>
-            <a:ext cx="8064510" cy="786384"/>
+            <a:ext cx="9464040" cy="786384"/>
           </a:xfrm>
           <a:prstGeom prst="rect">
             <a:avLst/>
@@ -9240,7 +9240,7 @@
         <p:spPr>
           <a:xfrm>
             <a:off x="640080" y="475488"/>
-            <a:ext cx="5857029" cy="786384"/>
+            <a:ext cx="9464040" cy="786384"/>
           </a:xfrm>
           <a:prstGeom prst="rect">
             <a:avLst/>
@@ -10396,7 +10396,7 @@
         <p:spPr>
           <a:xfrm>
             <a:off x="640080" y="475488"/>
-            <a:ext cx="7041943" cy="786384"/>
+            <a:ext cx="9464040" cy="786384"/>
           </a:xfrm>
           <a:prstGeom prst="rect">
             <a:avLst/>
@@ -11101,7 +11101,7 @@
         <p:spPr>
           <a:xfrm>
             <a:off x="640080" y="475488"/>
-            <a:ext cx="6025953" cy="786384"/>
+            <a:ext cx="9464040" cy="786384"/>
           </a:xfrm>
           <a:prstGeom prst="rect">
             <a:avLst/>
@@ -12031,7 +12031,7 @@
         <p:spPr>
           <a:xfrm>
             <a:off x="640080" y="475488"/>
-            <a:ext cx="7213897" cy="786384"/>
+            <a:ext cx="9464040" cy="786384"/>
           </a:xfrm>
           <a:prstGeom prst="rect">
             <a:avLst/>
@@ -13294,7 +13294,7 @@
         <p:spPr>
           <a:xfrm>
             <a:off x="640080" y="475488"/>
-            <a:ext cx="7112877" cy="786384"/>
+            <a:ext cx="9464040" cy="786384"/>
           </a:xfrm>
           <a:prstGeom prst="rect">
             <a:avLst/>
@@ -15071,7 +15071,7 @@
         <p:spPr>
           <a:xfrm>
             <a:off x="640080" y="475488"/>
-            <a:ext cx="7055631" cy="786384"/>
+            <a:ext cx="9464040" cy="786384"/>
           </a:xfrm>
           <a:prstGeom prst="rect">
             <a:avLst/>
@@ -16061,7 +16061,7 @@
         <p:spPr>
           <a:xfrm>
             <a:off x="640080" y="475488"/>
-            <a:ext cx="7373099" cy="786384"/>
+            <a:ext cx="9464040" cy="786384"/>
           </a:xfrm>
           <a:prstGeom prst="rect">
             <a:avLst/>
@@ -18270,7 +18270,7 @@
         <p:spPr>
           <a:xfrm>
             <a:off x="640080" y="475488"/>
-            <a:ext cx="7179309" cy="786384"/>
+            <a:ext cx="9464040" cy="786384"/>
           </a:xfrm>
           <a:prstGeom prst="rect">
             <a:avLst/>
@@ -19394,7 +19394,7 @@
         <p:spPr>
           <a:xfrm>
             <a:off x="640080" y="475488"/>
-            <a:ext cx="7386168" cy="786384"/>
+            <a:ext cx="9464040" cy="786384"/>
           </a:xfrm>
           <a:prstGeom prst="rect">
             <a:avLst/>

--- a/examples/brand/output/deck.pptx
+++ b/examples/brand/output/deck.pptx
@@ -6351,66 +6351,24 @@
       <p:grpSpPr/>
       <p:sp>
         <p:nvSpPr>
-          <p:cNvPr id="2" name="cpe|text|fill|1"/>
-          <p:cNvSpPr/>
-          <p:nvPr/>
-        </p:nvSpPr>
-        <p:spPr>
-          <a:xfrm>
-            <a:off x="640080" y="2148840"/>
-            <a:ext cx="822960" cy="64008"/>
-          </a:xfrm>
-          <a:prstGeom prst="rect">
-            <a:avLst/>
-          </a:prstGeom>
-          <a:solidFill>
-            <a:srgbClr val="C8A24A"/>
-          </a:solidFill>
-          <a:ln>
-            <a:noFill/>
-          </a:ln>
-        </p:spPr>
-        <p:txBody>
-          <a:bodyPr rtlCol="0" anchor="ctr" lIns="0" rIns="0" tIns="0" bIns="0"/>
-          <a:lstStyle/>
-          <a:p>
-            <a:pPr algn="ctr"/>
-          </a:p>
-        </p:txBody>
-      </p:sp>
-      <p:sp>
-        <p:nvSpPr>
-          <p:cNvPr id="3" name="cpe|text|text|2"/>
-          <p:cNvSpPr txBox="1"/>
-          <p:nvPr/>
-        </p:nvSpPr>
-        <p:spPr>
-          <a:xfrm>
-            <a:off x="640080" y="2377440"/>
-            <a:ext cx="9059418" cy="1737360"/>
-          </a:xfrm>
-          <a:prstGeom prst="rect">
-            <a:avLst/>
-          </a:prstGeom>
-          <a:noFill/>
-        </p:spPr>
-        <p:txBody>
-          <a:bodyPr wrap="square" lIns="0" rIns="0" tIns="0" bIns="0" anchor="t">
-            <a:noAutofit/>
-          </a:bodyPr>
-          <a:lstStyle/>
-          <a:p>
-            <a:pPr algn="l">
-              <a:lnSpc>
-                <a:spcPct val="100000"/>
-              </a:lnSpc>
-            </a:pPr>
-            <a:r>
-              <a:rPr sz="3600" b="1">
-                <a:solidFill>
-                  <a:srgbClr val="1B3A2F"/>
-                </a:solidFill>
-                <a:latin typeface="Georgia"/>
+          <p:cNvPr id="2" name="cpe|title|text|1"/>
+          <p:cNvSpPr>
+            <a:spLocks noGrp="1"/>
+          </p:cNvSpPr>
+          <p:nvPr>
+            <p:ph type="ctrTitle"/>
+          </p:nvPr>
+        </p:nvSpPr>
+        <p:spPr/>
+        <p:txBody>
+          <a:bodyPr/>
+          <a:lstStyle/>
+          <a:p>
+            <a:r>
+              <a:rPr sz="4400">
+                <a:solidFill>
+                  <a:srgbClr val="FFFFFF"/>
+                </a:solidFill>
               </a:rPr>
               <a:t>Repositioning Alvora for profitable growth</a:t>
             </a:r>
@@ -6419,78 +6377,26 @@
       </p:sp>
       <p:sp>
         <p:nvSpPr>
-          <p:cNvPr id="4" name="cpe|text|text|3"/>
-          <p:cNvSpPr txBox="1"/>
-          <p:nvPr/>
-        </p:nvSpPr>
-        <p:spPr>
-          <a:xfrm>
-            <a:off x="640080" y="4160520"/>
-            <a:ext cx="8133359" cy="822960"/>
-          </a:xfrm>
-          <a:prstGeom prst="rect">
-            <a:avLst/>
-          </a:prstGeom>
-          <a:noFill/>
-        </p:spPr>
-        <p:txBody>
-          <a:bodyPr wrap="square" lIns="0" rIns="0" tIns="0" bIns="0" anchor="t">
-            <a:noAutofit/>
-          </a:bodyPr>
-          <a:lstStyle/>
-          <a:p>
-            <a:pPr algn="l">
-              <a:lnSpc>
-                <a:spcPct val="100000"/>
-              </a:lnSpc>
-            </a:pPr>
-            <a:r>
-              <a:rPr sz="1600" b="0">
-                <a:solidFill>
-                  <a:srgbClr val="6F6F6F"/>
-                </a:solidFill>
-                <a:latin typeface="Calibri"/>
-              </a:rPr>
-              <a:t>Same deck spec, generated on the Kestrel Capital corporate template</a:t>
-            </a:r>
-          </a:p>
-        </p:txBody>
-      </p:sp>
-      <p:sp>
-        <p:nvSpPr>
-          <p:cNvPr id="5" name="cpe|text|text|4"/>
-          <p:cNvSpPr txBox="1"/>
-          <p:nvPr/>
-        </p:nvSpPr>
-        <p:spPr>
-          <a:xfrm>
-            <a:off x="640080" y="5989320"/>
-            <a:ext cx="8133359" cy="320040"/>
-          </a:xfrm>
-          <a:prstGeom prst="rect">
-            <a:avLst/>
-          </a:prstGeom>
-          <a:noFill/>
-        </p:spPr>
-        <p:txBody>
-          <a:bodyPr wrap="square" lIns="0" rIns="0" tIns="0" bIns="0" anchor="t">
-            <a:noAutofit/>
-          </a:bodyPr>
-          <a:lstStyle/>
-          <a:p>
-            <a:pPr algn="l">
-              <a:lnSpc>
-                <a:spcPct val="100000"/>
-              </a:lnSpc>
-            </a:pPr>
-            <a:r>
-              <a:rPr sz="1000" b="0">
-                <a:solidFill>
-                  <a:srgbClr val="6F6F6F"/>
-                </a:solidFill>
-                <a:latin typeface="Calibri"/>
-              </a:rPr>
-              <a:t>Alvora Retail (fictitious)   |   October 2026   |   Illustrative data</a:t>
+          <p:cNvPr id="3" name="cpe|subtitle|text|2"/>
+          <p:cNvSpPr>
+            <a:spLocks noGrp="1"/>
+          </p:cNvSpPr>
+          <p:nvPr>
+            <p:ph type="subTitle" idx="1"/>
+          </p:nvPr>
+        </p:nvSpPr>
+        <p:spPr/>
+        <p:txBody>
+          <a:bodyPr/>
+          <a:lstStyle/>
+          <a:p>
+            <a:r>
+              <a:rPr sz="3100">
+                <a:solidFill>
+                  <a:srgbClr val="FFFFFF"/>
+                </a:solidFill>
+              </a:rPr>
+              <a:t>Same deck spec, generated on the Kestrel Capital corporate template · Alvora Retail (fictitious) · October 2026</a:t>
             </a:r>
           </a:p>
         </p:txBody>
@@ -18387,7 +18293,7 @@
         <p:spPr>
           <a:xfrm>
             <a:off x="640080" y="1481328"/>
-            <a:ext cx="10911535" cy="274320"/>
+            <a:ext cx="6281242" cy="274320"/>
           </a:xfrm>
           <a:prstGeom prst="rect">
             <a:avLst/>
@@ -18435,7 +18341,7 @@
         <p:spPr>
           <a:xfrm>
             <a:off x="777240" y="2267712"/>
-            <a:ext cx="5341468" cy="1357884"/>
+            <a:ext cx="3026321" cy="1773936"/>
           </a:xfrm>
           <a:prstGeom prst="rect">
             <a:avLst/>
@@ -18463,8 +18369,8 @@
         </p:nvSpPr>
         <p:spPr>
           <a:xfrm>
-            <a:off x="6118708" y="2267712"/>
-            <a:ext cx="5341468" cy="1357884"/>
+            <a:off x="3803561" y="2267712"/>
+            <a:ext cx="3026321" cy="1773936"/>
           </a:xfrm>
           <a:prstGeom prst="rect">
             <a:avLst/>
@@ -18492,8 +18398,8 @@
         </p:nvSpPr>
         <p:spPr>
           <a:xfrm>
-            <a:off x="777240" y="3625596"/>
-            <a:ext cx="5341468" cy="1357884"/>
+            <a:off x="777240" y="4041648"/>
+            <a:ext cx="3026321" cy="1773936"/>
           </a:xfrm>
           <a:prstGeom prst="rect">
             <a:avLst/>
@@ -18523,8 +18429,8 @@
         </p:nvSpPr>
         <p:spPr>
           <a:xfrm>
-            <a:off x="6118708" y="3625596"/>
-            <a:ext cx="5341468" cy="1357884"/>
+            <a:off x="3803561" y="4041648"/>
+            <a:ext cx="3026321" cy="1773936"/>
           </a:xfrm>
           <a:prstGeom prst="rect">
             <a:avLst/>
@@ -18553,7 +18459,7 @@
         <p:spPr>
           <a:xfrm>
             <a:off x="868680" y="2340864"/>
-            <a:ext cx="5158588" cy="237744"/>
+            <a:ext cx="2843441" cy="237744"/>
           </a:xfrm>
           <a:prstGeom prst="rect">
             <a:avLst/>
@@ -18591,8 +18497,8 @@
         </p:nvSpPr>
         <p:spPr>
           <a:xfrm>
-            <a:off x="6210148" y="2340864"/>
-            <a:ext cx="5158588" cy="237744"/>
+            <a:off x="3895001" y="2340864"/>
+            <a:ext cx="2843441" cy="237744"/>
           </a:xfrm>
           <a:prstGeom prst="rect">
             <a:avLst/>
@@ -18630,8 +18536,8 @@
         </p:nvSpPr>
         <p:spPr>
           <a:xfrm>
-            <a:off x="868680" y="4672584"/>
-            <a:ext cx="5158588" cy="237744"/>
+            <a:off x="868680" y="5504688"/>
+            <a:ext cx="2843441" cy="237744"/>
           </a:xfrm>
           <a:prstGeom prst="rect">
             <a:avLst/>
@@ -18669,8 +18575,8 @@
         </p:nvSpPr>
         <p:spPr>
           <a:xfrm>
-            <a:off x="6210148" y="4672584"/>
-            <a:ext cx="5158588" cy="237744"/>
+            <a:off x="3895001" y="5504688"/>
+            <a:ext cx="2843441" cy="237744"/>
           </a:xfrm>
           <a:prstGeom prst="rect">
             <a:avLst/>
@@ -18708,8 +18614,8 @@
         </p:nvCxnSpPr>
         <p:spPr>
           <a:xfrm>
-            <a:off x="777240" y="4983480"/>
-            <a:ext cx="10728655" cy="0"/>
+            <a:off x="777240" y="5815584"/>
+            <a:ext cx="6098362" cy="0"/>
           </a:xfrm>
           <a:prstGeom prst="line">
             <a:avLst/>
@@ -18731,7 +18637,7 @@
         <p:spPr>
           <a:xfrm flipV="1">
             <a:off x="777240" y="2221992"/>
-            <a:ext cx="0" cy="2761488"/>
+            <a:ext cx="0" cy="3593592"/>
           </a:xfrm>
           <a:prstGeom prst="line">
             <a:avLst/>
@@ -18752,8 +18658,8 @@
         </p:nvSpPr>
         <p:spPr>
           <a:xfrm>
-            <a:off x="777240" y="5038344"/>
-            <a:ext cx="10682935" cy="274320"/>
+            <a:off x="777240" y="5870448"/>
+            <a:ext cx="6052642" cy="274320"/>
           </a:xfrm>
           <a:prstGeom prst="rect">
             <a:avLst/>
@@ -18830,8 +18736,8 @@
         </p:nvSpPr>
         <p:spPr>
           <a:xfrm>
-            <a:off x="6756081" y="3055285"/>
-            <a:ext cx="434523" cy="434523"/>
+            <a:off x="4003943" y="3296595"/>
+            <a:ext cx="567660" cy="567660"/>
           </a:xfrm>
           <a:prstGeom prst="ellipse">
             <a:avLst/>
@@ -18861,7 +18767,7 @@
         </p:nvSpPr>
         <p:spPr>
           <a:xfrm>
-            <a:off x="7227180" y="3162818"/>
+            <a:off x="4608178" y="3470697"/>
             <a:ext cx="759666" cy="219456"/>
           </a:xfrm>
           <a:prstGeom prst="rect">
@@ -18900,8 +18806,8 @@
         </p:nvSpPr>
         <p:spPr>
           <a:xfrm>
-            <a:off x="9758516" y="3854071"/>
-            <a:ext cx="412097" cy="412097"/>
+            <a:off x="5713331" y="4340127"/>
+            <a:ext cx="538362" cy="538362"/>
           </a:xfrm>
           <a:prstGeom prst="ellipse">
             <a:avLst/>
@@ -18931,7 +18837,7 @@
         </p:nvSpPr>
         <p:spPr>
           <a:xfrm>
-            <a:off x="10207189" y="3950391"/>
+            <a:off x="4912684" y="4499580"/>
             <a:ext cx="764072" cy="219456"/>
           </a:xfrm>
           <a:prstGeom prst="rect">
@@ -18970,8 +18876,8 @@
         </p:nvSpPr>
         <p:spPr>
           <a:xfrm>
-            <a:off x="3781914" y="2773605"/>
-            <a:ext cx="400413" cy="400413"/>
+            <a:off x="2331484" y="2928610"/>
+            <a:ext cx="523098" cy="523098"/>
           </a:xfrm>
           <a:prstGeom prst="ellipse">
             <a:avLst/>
@@ -19001,7 +18907,7 @@
         </p:nvSpPr>
         <p:spPr>
           <a:xfrm>
-            <a:off x="4218903" y="2864084"/>
+            <a:off x="2891158" y="3080431"/>
             <a:ext cx="758317" cy="219456"/>
           </a:xfrm>
           <a:prstGeom prst="rect">
@@ -19040,8 +18946,8 @@
         </p:nvSpPr>
         <p:spPr>
           <a:xfrm>
-            <a:off x="4861038" y="3599166"/>
-            <a:ext cx="378753" cy="378753"/>
+            <a:off x="2950896" y="4007120"/>
+            <a:ext cx="494801" cy="494801"/>
           </a:xfrm>
           <a:prstGeom prst="ellipse">
             <a:avLst/>
@@ -19071,7 +18977,7 @@
         </p:nvSpPr>
         <p:spPr>
           <a:xfrm>
-            <a:off x="5276366" y="3678814"/>
+            <a:off x="3482274" y="4144792"/>
             <a:ext cx="401467" cy="219456"/>
           </a:xfrm>
           <a:prstGeom prst="rect">
@@ -19110,8 +19016,8 @@
         </p:nvSpPr>
         <p:spPr>
           <a:xfrm>
-            <a:off x="7702191" y="2630764"/>
-            <a:ext cx="251572" cy="251572"/>
+            <a:off x="4607658" y="2742003"/>
+            <a:ext cx="328653" cy="328653"/>
           </a:xfrm>
           <a:prstGeom prst="ellipse">
             <a:avLst/>
@@ -19141,7 +19047,7 @@
         </p:nvSpPr>
         <p:spPr>
           <a:xfrm>
-            <a:off x="7990339" y="2646822"/>
+            <a:off x="4972886" y="2796601"/>
             <a:ext cx="1084310" cy="219456"/>
           </a:xfrm>
           <a:prstGeom prst="rect">
@@ -19180,8 +19086,8 @@
         </p:nvCxnSpPr>
         <p:spPr>
           <a:xfrm>
-            <a:off x="640080" y="5568696"/>
-            <a:ext cx="10911535" cy="0"/>
+            <a:off x="7122490" y="1481328"/>
+            <a:ext cx="0" cy="4718304"/>
           </a:xfrm>
           <a:prstGeom prst="line">
             <a:avLst/>
@@ -19201,8 +19107,8 @@
         </p:nvSpPr>
         <p:spPr>
           <a:xfrm>
-            <a:off x="640080" y="5705856"/>
-            <a:ext cx="3503066" cy="493776"/>
+            <a:off x="7351090" y="1481328"/>
+            <a:ext cx="4200525" cy="4718304"/>
           </a:xfrm>
           <a:prstGeom prst="rect">
             <a:avLst/>
@@ -19215,10 +19121,19 @@
           </a:bodyPr>
           <a:lstStyle/>
           <a:p>
-            <a:pPr algn="l">
+            <a:pPr algn="l" marL="155448" indent="-155448">
               <a:lnSpc>
-                <a:spcPct val="100000"/>
+                <a:spcPct val="108000"/>
               </a:lnSpc>
+              <a:spcAft>
+                <a:spcPts val="800"/>
+              </a:spcAft>
+              <a:buClr>
+                <a:srgbClr val="222222"/>
+              </a:buClr>
+              <a:buSzPct val="100000"/>
+              <a:buFont typeface="Arial"/>
+              <a:buChar char="•"/>
             </a:pPr>
             <a:r>
               <a:rPr sz="1200" b="0">
@@ -19248,34 +19163,20 @@
               <a:t> Competitor A on a comparable basket</a:t>
             </a:r>
           </a:p>
-        </p:txBody>
-      </p:sp>
-      <p:sp>
-        <p:nvSpPr>
-          <p:cNvPr id="31" name="cpe|commentary|text|30"/>
-          <p:cNvSpPr txBox="1"/>
-          <p:nvPr/>
-        </p:nvSpPr>
-        <p:spPr>
-          <a:xfrm>
-            <a:off x="4344314" y="5705856"/>
-            <a:ext cx="3503066" cy="493776"/>
-          </a:xfrm>
-          <a:prstGeom prst="rect">
-            <a:avLst/>
-          </a:prstGeom>
-          <a:noFill/>
-        </p:spPr>
-        <p:txBody>
-          <a:bodyPr wrap="square" lIns="0" rIns="0" tIns="0" bIns="0" anchor="t">
-            <a:noAutofit/>
-          </a:bodyPr>
-          <a:lstStyle/>
-          <a:p>
-            <a:pPr algn="l">
+          <a:p>
+            <a:pPr algn="l" marL="155448" indent="-155448">
               <a:lnSpc>
-                <a:spcPct val="100000"/>
+                <a:spcPct val="108000"/>
               </a:lnSpc>
+              <a:spcAft>
+                <a:spcPts val="800"/>
+              </a:spcAft>
+              <a:buClr>
+                <a:srgbClr val="222222"/>
+              </a:buClr>
+              <a:buSzPct val="100000"/>
+              <a:buFont typeface="Arial"/>
+              <a:buChar char="•"/>
             </a:pPr>
             <a:r>
               <a:rPr sz="1200" b="0">
@@ -19287,34 +19188,17 @@
               <a:t>Its experience score trails B and C on freshness and queues</a:t>
             </a:r>
           </a:p>
-        </p:txBody>
-      </p:sp>
-      <p:sp>
-        <p:nvSpPr>
-          <p:cNvPr id="32" name="cpe|commentary|text|31"/>
-          <p:cNvSpPr txBox="1"/>
-          <p:nvPr/>
-        </p:nvSpPr>
-        <p:spPr>
-          <a:xfrm>
-            <a:off x="8048549" y="5705856"/>
-            <a:ext cx="3503066" cy="493776"/>
-          </a:xfrm>
-          <a:prstGeom prst="rect">
-            <a:avLst/>
-          </a:prstGeom>
-          <a:noFill/>
-        </p:spPr>
-        <p:txBody>
-          <a:bodyPr wrap="square" lIns="0" rIns="0" tIns="0" bIns="0" anchor="t">
-            <a:noAutofit/>
-          </a:bodyPr>
-          <a:lstStyle/>
-          <a:p>
-            <a:pPr algn="l">
+          <a:p>
+            <a:pPr algn="l" marL="155448" indent="-155448">
               <a:lnSpc>
-                <a:spcPct val="100000"/>
+                <a:spcPct val="108000"/>
               </a:lnSpc>
+              <a:buClr>
+                <a:srgbClr val="222222"/>
+              </a:buClr>
+              <a:buSzPct val="100000"/>
+              <a:buFont typeface="Arial"/>
+              <a:buChar char="•"/>
             </a:pPr>
             <a:r>
               <a:rPr sz="1200" b="0">

--- a/examples/brand/output/deck.pptx
+++ b/examples/brand/output/deck.pptx
@@ -10419,7 +10419,7 @@
         <p:spPr>
           <a:xfrm>
             <a:off x="640080" y="1517904"/>
-            <a:ext cx="411480" cy="411480"/>
+            <a:ext cx="411480" cy="1003554"/>
           </a:xfrm>
           <a:prstGeom prst="rect">
             <a:avLst/>
@@ -10427,7 +10427,7 @@
           <a:noFill/>
         </p:spPr>
         <p:txBody>
-          <a:bodyPr wrap="square" lIns="0" rIns="0" tIns="0" bIns="0" anchor="t">
+          <a:bodyPr wrap="square" lIns="0" rIns="0" tIns="0" bIns="0" anchor="ctr">
             <a:noAutofit/>
           </a:bodyPr>
           <a:lstStyle/>
@@ -10466,7 +10466,7 @@
           <a:noFill/>
         </p:spPr>
         <p:txBody>
-          <a:bodyPr wrap="square" lIns="0" rIns="0" tIns="0" bIns="0" anchor="t">
+          <a:bodyPr wrap="square" lIns="0" rIns="0" tIns="0" bIns="0" anchor="ctr">
             <a:noAutofit/>
           </a:bodyPr>
           <a:lstStyle/>
@@ -10505,7 +10505,7 @@
           <a:noFill/>
         </p:spPr>
         <p:txBody>
-          <a:bodyPr wrap="square" lIns="0" rIns="0" tIns="0" bIns="0" anchor="t">
+          <a:bodyPr wrap="square" lIns="0" rIns="0" tIns="0" bIns="0" anchor="ctr">
             <a:noAutofit/>
           </a:bodyPr>
           <a:lstStyle/>
@@ -10557,7 +10557,7 @@
         <p:spPr>
           <a:xfrm>
             <a:off x="640080" y="2731770"/>
-            <a:ext cx="411480" cy="411480"/>
+            <a:ext cx="411480" cy="1003554"/>
           </a:xfrm>
           <a:prstGeom prst="rect">
             <a:avLst/>
@@ -10565,7 +10565,7 @@
           <a:noFill/>
         </p:spPr>
         <p:txBody>
-          <a:bodyPr wrap="square" lIns="0" rIns="0" tIns="0" bIns="0" anchor="t">
+          <a:bodyPr wrap="square" lIns="0" rIns="0" tIns="0" bIns="0" anchor="ctr">
             <a:noAutofit/>
           </a:bodyPr>
           <a:lstStyle/>
@@ -10604,7 +10604,7 @@
           <a:noFill/>
         </p:spPr>
         <p:txBody>
-          <a:bodyPr wrap="square" lIns="0" rIns="0" tIns="0" bIns="0" anchor="t">
+          <a:bodyPr wrap="square" lIns="0" rIns="0" tIns="0" bIns="0" anchor="ctr">
             <a:noAutofit/>
           </a:bodyPr>
           <a:lstStyle/>
@@ -10643,7 +10643,7 @@
           <a:noFill/>
         </p:spPr>
         <p:txBody>
-          <a:bodyPr wrap="square" lIns="0" rIns="0" tIns="0" bIns="0" anchor="t">
+          <a:bodyPr wrap="square" lIns="0" rIns="0" tIns="0" bIns="0" anchor="ctr">
             <a:noAutofit/>
           </a:bodyPr>
           <a:lstStyle/>
@@ -10695,7 +10695,7 @@
         <p:spPr>
           <a:xfrm>
             <a:off x="640080" y="3945636"/>
-            <a:ext cx="411480" cy="411480"/>
+            <a:ext cx="411480" cy="1003554"/>
           </a:xfrm>
           <a:prstGeom prst="rect">
             <a:avLst/>
@@ -10703,7 +10703,7 @@
           <a:noFill/>
         </p:spPr>
         <p:txBody>
-          <a:bodyPr wrap="square" lIns="0" rIns="0" tIns="0" bIns="0" anchor="t">
+          <a:bodyPr wrap="square" lIns="0" rIns="0" tIns="0" bIns="0" anchor="ctr">
             <a:noAutofit/>
           </a:bodyPr>
           <a:lstStyle/>
@@ -10742,7 +10742,7 @@
           <a:noFill/>
         </p:spPr>
         <p:txBody>
-          <a:bodyPr wrap="square" lIns="0" rIns="0" tIns="0" bIns="0" anchor="t">
+          <a:bodyPr wrap="square" lIns="0" rIns="0" tIns="0" bIns="0" anchor="ctr">
             <a:noAutofit/>
           </a:bodyPr>
           <a:lstStyle/>
@@ -10781,7 +10781,7 @@
           <a:noFill/>
         </p:spPr>
         <p:txBody>
-          <a:bodyPr wrap="square" lIns="0" rIns="0" tIns="0" bIns="0" anchor="t">
+          <a:bodyPr wrap="square" lIns="0" rIns="0" tIns="0" bIns="0" anchor="ctr">
             <a:noAutofit/>
           </a:bodyPr>
           <a:lstStyle/>
@@ -10833,7 +10833,7 @@
         <p:spPr>
           <a:xfrm>
             <a:off x="640080" y="5159502"/>
-            <a:ext cx="411480" cy="411480"/>
+            <a:ext cx="411480" cy="1003554"/>
           </a:xfrm>
           <a:prstGeom prst="rect">
             <a:avLst/>
@@ -10841,7 +10841,7 @@
           <a:noFill/>
         </p:spPr>
         <p:txBody>
-          <a:bodyPr wrap="square" lIns="0" rIns="0" tIns="0" bIns="0" anchor="t">
+          <a:bodyPr wrap="square" lIns="0" rIns="0" tIns="0" bIns="0" anchor="ctr">
             <a:noAutofit/>
           </a:bodyPr>
           <a:lstStyle/>
@@ -10880,7 +10880,7 @@
           <a:noFill/>
         </p:spPr>
         <p:txBody>
-          <a:bodyPr wrap="square" lIns="0" rIns="0" tIns="0" bIns="0" anchor="t">
+          <a:bodyPr wrap="square" lIns="0" rIns="0" tIns="0" bIns="0" anchor="ctr">
             <a:noAutofit/>
           </a:bodyPr>
           <a:lstStyle/>
@@ -10919,7 +10919,7 @@
           <a:noFill/>
         </p:spPr>
         <p:txBody>
-          <a:bodyPr wrap="square" lIns="0" rIns="0" tIns="0" bIns="0" anchor="t">
+          <a:bodyPr wrap="square" lIns="0" rIns="0" tIns="0" bIns="0" anchor="ctr">
             <a:noAutofit/>
           </a:bodyPr>
           <a:lstStyle/>

--- a/examples/brand/output/deck.pptx
+++ b/examples/brand/output/deck.pptx
@@ -7121,7 +7121,7 @@
         <p:spPr>
           <a:xfrm>
             <a:off x="4415459" y="2121408"/>
-            <a:ext cx="0" cy="3401568"/>
+            <a:ext cx="0" cy="3840480"/>
           </a:xfrm>
           <a:prstGeom prst="line">
             <a:avLst/>
@@ -7142,7 +7142,7 @@
         <p:spPr>
           <a:xfrm>
             <a:off x="5434910" y="2121408"/>
-            <a:ext cx="0" cy="3401568"/>
+            <a:ext cx="0" cy="3840480"/>
           </a:xfrm>
           <a:prstGeom prst="line">
             <a:avLst/>
@@ -7163,7 +7163,7 @@
         <p:spPr>
           <a:xfrm>
             <a:off x="6454361" y="2121408"/>
-            <a:ext cx="0" cy="3401568"/>
+            <a:ext cx="0" cy="3840480"/>
           </a:xfrm>
           <a:prstGeom prst="line">
             <a:avLst/>
@@ -7184,7 +7184,7 @@
         <p:spPr>
           <a:xfrm>
             <a:off x="7473812" y="2121408"/>
-            <a:ext cx="0" cy="3401568"/>
+            <a:ext cx="0" cy="3840480"/>
           </a:xfrm>
           <a:prstGeom prst="line">
             <a:avLst/>
@@ -7205,7 +7205,7 @@
         <p:spPr>
           <a:xfrm>
             <a:off x="8493263" y="2121408"/>
-            <a:ext cx="0" cy="3401568"/>
+            <a:ext cx="0" cy="3840480"/>
           </a:xfrm>
           <a:prstGeom prst="line">
             <a:avLst/>
@@ -7226,7 +7226,7 @@
         <p:spPr>
           <a:xfrm>
             <a:off x="9512714" y="2121408"/>
-            <a:ext cx="0" cy="3401568"/>
+            <a:ext cx="0" cy="3840480"/>
           </a:xfrm>
           <a:prstGeom prst="line">
             <a:avLst/>
@@ -7247,7 +7247,7 @@
         <p:spPr>
           <a:xfrm>
             <a:off x="10532164" y="2121408"/>
-            <a:ext cx="0" cy="3401568"/>
+            <a:ext cx="0" cy="3840480"/>
           </a:xfrm>
           <a:prstGeom prst="line">
             <a:avLst/>
@@ -7268,7 +7268,7 @@
         <p:spPr>
           <a:xfrm>
             <a:off x="3905734" y="2075688"/>
-            <a:ext cx="0" cy="3447288"/>
+            <a:ext cx="0" cy="3886200"/>
           </a:xfrm>
           <a:prstGeom prst="line">
             <a:avLst/>
@@ -7289,7 +7289,7 @@
         </p:nvSpPr>
         <p:spPr>
           <a:xfrm>
-            <a:off x="3448534" y="5541264"/>
+            <a:off x="3448534" y="5980176"/>
             <a:ext cx="914400" cy="201168"/>
           </a:xfrm>
           <a:prstGeom prst="rect">
@@ -7329,7 +7329,7 @@
         <p:spPr>
           <a:xfrm>
             <a:off x="640080" y="2121408"/>
-            <a:ext cx="2618768" cy="566928"/>
+            <a:ext cx="2618768" cy="640080"/>
           </a:xfrm>
           <a:prstGeom prst="rect">
             <a:avLst/>
@@ -7367,8 +7367,8 @@
         </p:nvSpPr>
         <p:spPr>
           <a:xfrm>
-            <a:off x="3423440" y="2257471"/>
-            <a:ext cx="3003489" cy="294803"/>
+            <a:off x="3423440" y="2275027"/>
+            <a:ext cx="3003489" cy="332842"/>
           </a:xfrm>
           <a:prstGeom prst="rect">
             <a:avLst/>
@@ -7396,8 +7396,8 @@
         </p:nvSpPr>
         <p:spPr>
           <a:xfrm>
-            <a:off x="3478304" y="2257471"/>
-            <a:ext cx="2893761" cy="294803"/>
+            <a:off x="3478304" y="2275027"/>
+            <a:ext cx="2893761" cy="332842"/>
           </a:xfrm>
           <a:prstGeom prst="rect">
             <a:avLst/>
@@ -7435,7 +7435,7 @@
         </p:nvCxnSpPr>
         <p:spPr>
           <a:xfrm>
-            <a:off x="640080" y="2688336"/>
+            <a:off x="640080" y="2761488"/>
             <a:ext cx="10911535" cy="0"/>
           </a:xfrm>
           <a:prstGeom prst="line">
@@ -7456,8 +7456,8 @@
         </p:nvSpPr>
         <p:spPr>
           <a:xfrm>
-            <a:off x="640080" y="2688336"/>
-            <a:ext cx="2618768" cy="566928"/>
+            <a:off x="640080" y="2761488"/>
+            <a:ext cx="2618768" cy="640080"/>
           </a:xfrm>
           <a:prstGeom prst="rect">
             <a:avLst/>
@@ -7495,8 +7495,8 @@
         </p:nvSpPr>
         <p:spPr>
           <a:xfrm>
-            <a:off x="3423440" y="2824399"/>
-            <a:ext cx="4022939" cy="294803"/>
+            <a:off x="3423440" y="2915107"/>
+            <a:ext cx="4022939" cy="332842"/>
           </a:xfrm>
           <a:prstGeom prst="rect">
             <a:avLst/>
@@ -7524,8 +7524,8 @@
         </p:nvSpPr>
         <p:spPr>
           <a:xfrm>
-            <a:off x="3478304" y="2824399"/>
-            <a:ext cx="3913211" cy="294803"/>
+            <a:off x="3478304" y="2915107"/>
+            <a:ext cx="3913211" cy="332842"/>
           </a:xfrm>
           <a:prstGeom prst="rect">
             <a:avLst/>
@@ -7563,7 +7563,7 @@
         </p:nvCxnSpPr>
         <p:spPr>
           <a:xfrm>
-            <a:off x="640080" y="3255264"/>
+            <a:off x="640080" y="3401568"/>
             <a:ext cx="10911535" cy="0"/>
           </a:xfrm>
           <a:prstGeom prst="line">
@@ -7584,8 +7584,8 @@
         </p:nvSpPr>
         <p:spPr>
           <a:xfrm>
-            <a:off x="640080" y="3255264"/>
-            <a:ext cx="2618768" cy="566928"/>
+            <a:off x="640080" y="3401568"/>
+            <a:ext cx="2618768" cy="640080"/>
           </a:xfrm>
           <a:prstGeom prst="rect">
             <a:avLst/>
@@ -7623,8 +7623,8 @@
         </p:nvSpPr>
         <p:spPr>
           <a:xfrm>
-            <a:off x="4442891" y="3391327"/>
-            <a:ext cx="6061841" cy="294803"/>
+            <a:off x="4442891" y="3555187"/>
+            <a:ext cx="6061841" cy="332842"/>
           </a:xfrm>
           <a:prstGeom prst="rect">
             <a:avLst/>
@@ -7652,8 +7652,8 @@
         </p:nvSpPr>
         <p:spPr>
           <a:xfrm>
-            <a:off x="4497755" y="3391327"/>
-            <a:ext cx="5952113" cy="294803"/>
+            <a:off x="4497755" y="3555187"/>
+            <a:ext cx="5952113" cy="332842"/>
           </a:xfrm>
           <a:prstGeom prst="rect">
             <a:avLst/>
@@ -7691,7 +7691,7 @@
         </p:nvCxnSpPr>
         <p:spPr>
           <a:xfrm>
-            <a:off x="640080" y="3822192"/>
+            <a:off x="640080" y="4041648"/>
             <a:ext cx="10911535" cy="0"/>
           </a:xfrm>
           <a:prstGeom prst="line">
@@ -7712,8 +7712,8 @@
         </p:nvSpPr>
         <p:spPr>
           <a:xfrm>
-            <a:off x="640080" y="3822192"/>
-            <a:ext cx="2618768" cy="566928"/>
+            <a:off x="640080" y="4041648"/>
+            <a:ext cx="2618768" cy="640080"/>
           </a:xfrm>
           <a:prstGeom prst="rect">
             <a:avLst/>
@@ -7751,8 +7751,8 @@
         </p:nvSpPr>
         <p:spPr>
           <a:xfrm>
-            <a:off x="5462342" y="3958255"/>
-            <a:ext cx="6061841" cy="294803"/>
+            <a:off x="5462342" y="4195267"/>
+            <a:ext cx="6061841" cy="332842"/>
           </a:xfrm>
           <a:prstGeom prst="rect">
             <a:avLst/>
@@ -7780,8 +7780,8 @@
         </p:nvSpPr>
         <p:spPr>
           <a:xfrm>
-            <a:off x="5517206" y="3958255"/>
-            <a:ext cx="5952113" cy="294803"/>
+            <a:off x="5517206" y="4195267"/>
+            <a:ext cx="5952113" cy="332842"/>
           </a:xfrm>
           <a:prstGeom prst="rect">
             <a:avLst/>
@@ -7819,7 +7819,7 @@
         </p:nvCxnSpPr>
         <p:spPr>
           <a:xfrm>
-            <a:off x="640080" y="4389120"/>
+            <a:off x="640080" y="4681728"/>
             <a:ext cx="10911535" cy="0"/>
           </a:xfrm>
           <a:prstGeom prst="line">
@@ -7840,8 +7840,8 @@
         </p:nvSpPr>
         <p:spPr>
           <a:xfrm>
-            <a:off x="640080" y="4389120"/>
-            <a:ext cx="2618768" cy="566928"/>
+            <a:off x="640080" y="4681728"/>
+            <a:ext cx="2618768" cy="640080"/>
           </a:xfrm>
           <a:prstGeom prst="rect">
             <a:avLst/>
@@ -7879,8 +7879,8 @@
         </p:nvSpPr>
         <p:spPr>
           <a:xfrm>
-            <a:off x="6481793" y="4604553"/>
-            <a:ext cx="1984038" cy="294803"/>
+            <a:off x="6481793" y="4924958"/>
+            <a:ext cx="1984038" cy="332842"/>
           </a:xfrm>
           <a:prstGeom prst="rect">
             <a:avLst/>
@@ -7908,8 +7908,8 @@
         </p:nvSpPr>
         <p:spPr>
           <a:xfrm>
-            <a:off x="6536657" y="4604553"/>
-            <a:ext cx="1874310" cy="294803"/>
+            <a:off x="6536657" y="4924958"/>
+            <a:ext cx="1874310" cy="332842"/>
           </a:xfrm>
           <a:prstGeom prst="rect">
             <a:avLst/>
@@ -7947,8 +7947,8 @@
         </p:nvSpPr>
         <p:spPr>
           <a:xfrm>
-            <a:off x="8520695" y="4604553"/>
-            <a:ext cx="3003489" cy="294803"/>
+            <a:off x="8520695" y="4924958"/>
+            <a:ext cx="3003489" cy="332842"/>
           </a:xfrm>
           <a:prstGeom prst="rect">
             <a:avLst/>
@@ -7976,8 +7976,8 @@
         </p:nvSpPr>
         <p:spPr>
           <a:xfrm>
-            <a:off x="8703575" y="4604553"/>
-            <a:ext cx="2765745" cy="294803"/>
+            <a:off x="8703575" y="4924958"/>
+            <a:ext cx="2765745" cy="332842"/>
           </a:xfrm>
           <a:prstGeom prst="rect">
             <a:avLst/>
@@ -8015,7 +8015,7 @@
         </p:nvSpPr>
         <p:spPr>
           <a:xfrm>
-            <a:off x="8401823" y="4660514"/>
+            <a:off x="8401823" y="4999939"/>
             <a:ext cx="182880" cy="182880"/>
           </a:xfrm>
           <a:prstGeom prst="diamond">
@@ -8046,7 +8046,7 @@
         </p:nvSpPr>
         <p:spPr>
           <a:xfrm>
-            <a:off x="8199119" y="4403385"/>
+            <a:off x="8199119" y="4723790"/>
             <a:ext cx="588288" cy="182880"/>
           </a:xfrm>
           <a:prstGeom prst="rect">
@@ -8085,7 +8085,7 @@
         </p:nvCxnSpPr>
         <p:spPr>
           <a:xfrm>
-            <a:off x="640080" y="4956048"/>
+            <a:off x="640080" y="5321808"/>
             <a:ext cx="10911535" cy="0"/>
           </a:xfrm>
           <a:prstGeom prst="line">
@@ -8106,8 +8106,8 @@
         </p:nvSpPr>
         <p:spPr>
           <a:xfrm>
-            <a:off x="640080" y="4956048"/>
-            <a:ext cx="2618768" cy="566928"/>
+            <a:off x="640080" y="5321808"/>
+            <a:ext cx="2618768" cy="640080"/>
           </a:xfrm>
           <a:prstGeom prst="rect">
             <a:avLst/>
@@ -8145,8 +8145,8 @@
         </p:nvSpPr>
         <p:spPr>
           <a:xfrm>
-            <a:off x="7501244" y="5092111"/>
-            <a:ext cx="4022939" cy="294803"/>
+            <a:off x="7501244" y="5475427"/>
+            <a:ext cx="4022939" cy="332842"/>
           </a:xfrm>
           <a:prstGeom prst="rect">
             <a:avLst/>
@@ -8174,8 +8174,8 @@
         </p:nvSpPr>
         <p:spPr>
           <a:xfrm>
-            <a:off x="7556108" y="5092111"/>
-            <a:ext cx="3913211" cy="294803"/>
+            <a:off x="7556108" y="5475427"/>
+            <a:ext cx="3913211" cy="332842"/>
           </a:xfrm>
           <a:prstGeom prst="rect">
             <a:avLst/>
@@ -8213,7 +8213,7 @@
         </p:nvCxnSpPr>
         <p:spPr>
           <a:xfrm>
-            <a:off x="640080" y="5522976"/>
+            <a:off x="640080" y="5961888"/>
             <a:ext cx="10911535" cy="0"/>
           </a:xfrm>
           <a:prstGeom prst="line">
@@ -12054,7 +12054,7 @@
         <p:spPr>
           <a:xfrm>
             <a:off x="640080" y="1481328"/>
-            <a:ext cx="2426132" cy="566928"/>
+            <a:ext cx="2426132" cy="514350"/>
           </a:xfrm>
           <a:prstGeom prst="rect">
             <a:avLst/>
@@ -12092,8 +12092,8 @@
         </p:nvSpPr>
         <p:spPr>
           <a:xfrm>
-            <a:off x="640080" y="2048256"/>
-            <a:ext cx="2426132" cy="237744"/>
+            <a:off x="640080" y="1995678"/>
+            <a:ext cx="2426132" cy="209550"/>
           </a:xfrm>
           <a:prstGeom prst="rect">
             <a:avLst/>
@@ -12131,7 +12131,7 @@
         </p:nvSpPr>
         <p:spPr>
           <a:xfrm>
-            <a:off x="640080" y="2304288"/>
+            <a:off x="640080" y="2205228"/>
             <a:ext cx="2426132" cy="209169"/>
           </a:xfrm>
           <a:prstGeom prst="rect">
@@ -12192,7 +12192,7 @@
         <p:spPr>
           <a:xfrm>
             <a:off x="3468548" y="1481328"/>
-            <a:ext cx="2426132" cy="566928"/>
+            <a:ext cx="2426132" cy="514350"/>
           </a:xfrm>
           <a:prstGeom prst="rect">
             <a:avLst/>
@@ -12230,8 +12230,8 @@
         </p:nvSpPr>
         <p:spPr>
           <a:xfrm>
-            <a:off x="3468548" y="2048256"/>
-            <a:ext cx="2426132" cy="237744"/>
+            <a:off x="3468548" y="1995678"/>
+            <a:ext cx="2426132" cy="209550"/>
           </a:xfrm>
           <a:prstGeom prst="rect">
             <a:avLst/>
@@ -12269,7 +12269,7 @@
         </p:nvSpPr>
         <p:spPr>
           <a:xfrm>
-            <a:off x="3468548" y="2304288"/>
+            <a:off x="3468548" y="2205228"/>
             <a:ext cx="2426132" cy="209169"/>
           </a:xfrm>
           <a:prstGeom prst="rect">
@@ -12330,7 +12330,7 @@
         <p:spPr>
           <a:xfrm>
             <a:off x="6297016" y="1481328"/>
-            <a:ext cx="2426132" cy="566928"/>
+            <a:ext cx="2426132" cy="514350"/>
           </a:xfrm>
           <a:prstGeom prst="rect">
             <a:avLst/>
@@ -12368,8 +12368,8 @@
         </p:nvSpPr>
         <p:spPr>
           <a:xfrm>
-            <a:off x="6297016" y="2048256"/>
-            <a:ext cx="2426132" cy="237744"/>
+            <a:off x="6297016" y="1995678"/>
+            <a:ext cx="2426132" cy="209550"/>
           </a:xfrm>
           <a:prstGeom prst="rect">
             <a:avLst/>
@@ -12407,7 +12407,7 @@
         </p:nvSpPr>
         <p:spPr>
           <a:xfrm>
-            <a:off x="6297016" y="2304288"/>
+            <a:off x="6297016" y="2205228"/>
             <a:ext cx="2426132" cy="209169"/>
           </a:xfrm>
           <a:prstGeom prst="rect">
@@ -12468,7 +12468,7 @@
         <p:spPr>
           <a:xfrm>
             <a:off x="9125483" y="1481328"/>
-            <a:ext cx="2426132" cy="566928"/>
+            <a:ext cx="2426132" cy="514350"/>
           </a:xfrm>
           <a:prstGeom prst="rect">
             <a:avLst/>
@@ -12506,8 +12506,8 @@
         </p:nvSpPr>
         <p:spPr>
           <a:xfrm>
-            <a:off x="9125483" y="2048256"/>
-            <a:ext cx="2426132" cy="237744"/>
+            <a:off x="9125483" y="1995678"/>
+            <a:ext cx="2426132" cy="209550"/>
           </a:xfrm>
           <a:prstGeom prst="rect">
             <a:avLst/>
@@ -12545,7 +12545,7 @@
         </p:nvSpPr>
         <p:spPr>
           <a:xfrm>
-            <a:off x="9125483" y="2304288"/>
+            <a:off x="9125483" y="2205228"/>
             <a:ext cx="2426132" cy="209169"/>
           </a:xfrm>
           <a:prstGeom prst="rect">
